--- a/docs/materials/ミュージカル発表_生徒提示スライド_20261001.pptx
+++ b/docs/materials/ミュージカル発表_生徒提示スライド_20261001.pptx
@@ -11030,7 +11030,7 @@
                 <a:ea typeface="Meiryo" pitchFamily="34" charset="-122"/>
                 <a:cs typeface="Meiryo" pitchFamily="34" charset="-120"/>
               </a:rPr>
-              <a:t>家来の リーダー。王女に 報告する</a:t>
+              <a:t>家来の リーダー。王女に 報告する。たたかいの さいごの 見せ場</a:t>
             </a:r>
             <a:endParaRPr lang="en-US" sz="1300" dirty="0"/>
           </a:p>
@@ -11213,7 +11213,7 @@
                 <a:ea typeface="Meiryo" pitchFamily="34" charset="-122"/>
                 <a:cs typeface="Meiryo" pitchFamily="34" charset="-120"/>
               </a:rPr>
-              <a:t>王女に「ブブー！」と 言う 家来。たたかいの さいごの 見せ場</a:t>
+              <a:t>王女に「ブブー！」と 言う 家来</a:t>
             </a:r>
             <a:endParaRPr lang="en-US" sz="1300" dirty="0"/>
           </a:p>
@@ -15548,7 +15548,7 @@
                 <a:ea typeface="Meiryo" pitchFamily="34" charset="-122"/>
                 <a:cs typeface="Meiryo" pitchFamily="34" charset="-120"/>
               </a:rPr>
-              <a:t>家来頭と 家来D → 剣士の 一振り → ひざを つく　ドン！</a:t>
+              <a:t>家来Aと 家来D → 剣士の 一振り → ひざを つく　ドン！</a:t>
             </a:r>
             <a:endParaRPr lang="en-US" sz="1800" dirty="0"/>
           </a:p>
@@ -15648,7 +15648,7 @@
                 <a:ea typeface="Meiryo" pitchFamily="34" charset="-122"/>
                 <a:cs typeface="Meiryo" pitchFamily="34" charset="-120"/>
               </a:rPr>
-              <a:t>家来A → 剣と 剣で にらみあい → 剣を 落とす　ドン！</a:t>
+              <a:t>家来頭 → 剣と 剣で にらみあい → 剣を 落とす　ドン！</a:t>
             </a:r>
             <a:endParaRPr lang="en-US" sz="1800" dirty="0"/>
           </a:p>
